--- a/Science_Complete_Course_SagarSir/03_Biology_जीव_विज्ञान/Class_12_Cell_Structure_Functions.pptx
+++ b/Science_Complete_Course_SagarSir/03_Biology_जीव_विज्ञान/Class_12_Cell_Structure_Functions.pptx
@@ -3557,7 +3557,7 @@
               </a:defRPr>
             </a:pPr>
             <a:r>
-              <a:t>मार्गदर्शक: सागर सर (NMMS King)  |  Helpline / WhatsApp: +91 91101 13671  |  Website: sagarcoaching.tech</a:t>
+              <a:t>मार्गदर्शक: सागर सर (NMMS King)  |  Website: sagarcoaching.tech</a:t>
             </a:r>
           </a:p>
         </p:txBody>
@@ -3729,7 +3729,7 @@
               </a:defRPr>
             </a:pPr>
             <a:r>
-              <a:t>WhatsApp / Helpline: +91 91101 13671  |  वेबसाइट: sagarcoaching.tech  |  Slide 10 of 37</a:t>
+              <a:t>वेबसाइट: sagarcoaching.tech  |  Slide 10 of 37</a:t>
             </a:r>
           </a:p>
         </p:txBody>
@@ -4176,7 +4176,7 @@
               </a:defRPr>
             </a:pPr>
             <a:r>
-              <a:t>WhatsApp / Helpline: +91 91101 13671  |  वेबसाइट: sagarcoaching.tech  |  Slide 11 of 37</a:t>
+              <a:t>वेबसाइट: sagarcoaching.tech  |  Slide 11 of 37</a:t>
             </a:r>
           </a:p>
         </p:txBody>
@@ -4694,7 +4694,7 @@
               </a:defRPr>
             </a:pPr>
             <a:r>
-              <a:t>WhatsApp / Helpline: +91 91101 13671  |  वेबसाइट: sagarcoaching.tech  |  Slide 12 of 37</a:t>
+              <a:t>वेबसाइट: sagarcoaching.tech  |  Slide 12 of 37</a:t>
             </a:r>
           </a:p>
         </p:txBody>
@@ -5141,7 +5141,7 @@
               </a:defRPr>
             </a:pPr>
             <a:r>
-              <a:t>WhatsApp / Helpline: +91 91101 13671  |  वेबसाइट: sagarcoaching.tech  |  Slide 13 of 37</a:t>
+              <a:t>वेबसाइट: sagarcoaching.tech  |  Slide 13 of 37</a:t>
             </a:r>
           </a:p>
         </p:txBody>
@@ -5659,7 +5659,7 @@
               </a:defRPr>
             </a:pPr>
             <a:r>
-              <a:t>WhatsApp / Helpline: +91 91101 13671  |  वेबसाइट: sagarcoaching.tech  |  Slide 14 of 37</a:t>
+              <a:t>वेबसाइट: sagarcoaching.tech  |  Slide 14 of 37</a:t>
             </a:r>
           </a:p>
         </p:txBody>
@@ -6106,7 +6106,7 @@
               </a:defRPr>
             </a:pPr>
             <a:r>
-              <a:t>WhatsApp / Helpline: +91 91101 13671  |  वेबसाइट: sagarcoaching.tech  |  Slide 15 of 37</a:t>
+              <a:t>वेबसाइट: sagarcoaching.tech  |  Slide 15 of 37</a:t>
             </a:r>
           </a:p>
         </p:txBody>
@@ -6624,7 +6624,7 @@
               </a:defRPr>
             </a:pPr>
             <a:r>
-              <a:t>WhatsApp / Helpline: +91 91101 13671  |  वेबसाइट: sagarcoaching.tech  |  Slide 16 of 37</a:t>
+              <a:t>वेबसाइट: sagarcoaching.tech  |  Slide 16 of 37</a:t>
             </a:r>
           </a:p>
         </p:txBody>
@@ -7071,7 +7071,7 @@
               </a:defRPr>
             </a:pPr>
             <a:r>
-              <a:t>WhatsApp / Helpline: +91 91101 13671  |  वेबसाइट: sagarcoaching.tech  |  Slide 17 of 37</a:t>
+              <a:t>वेबसाइट: sagarcoaching.tech  |  Slide 17 of 37</a:t>
             </a:r>
           </a:p>
         </p:txBody>
@@ -7589,7 +7589,7 @@
               </a:defRPr>
             </a:pPr>
             <a:r>
-              <a:t>WhatsApp / Helpline: +91 91101 13671  |  वेबसाइट: sagarcoaching.tech  |  Slide 18 of 37</a:t>
+              <a:t>वेबसाइट: sagarcoaching.tech  |  Slide 18 of 37</a:t>
             </a:r>
           </a:p>
         </p:txBody>
@@ -8036,7 +8036,7 @@
               </a:defRPr>
             </a:pPr>
             <a:r>
-              <a:t>WhatsApp / Helpline: +91 91101 13671  |  वेबसाइट: sagarcoaching.tech  |  Slide 19 of 37</a:t>
+              <a:t>वेबसाइट: sagarcoaching.tech  |  Slide 19 of 37</a:t>
             </a:r>
           </a:p>
         </p:txBody>
@@ -8554,7 +8554,7 @@
               </a:defRPr>
             </a:pPr>
             <a:r>
-              <a:t>WhatsApp / Helpline: +91 91101 13671  |  वेबसाइट: sagarcoaching.tech  |  Slide 2 of 37</a:t>
+              <a:t>वेबसाइट: sagarcoaching.tech  |  Slide 2 of 37</a:t>
             </a:r>
           </a:p>
         </p:txBody>
@@ -8876,7 +8876,7 @@
               </a:defRPr>
             </a:pPr>
             <a:r>
-              <a:t>WhatsApp / Helpline: +91 91101 13671  |  वेबसाइट: sagarcoaching.tech  |  Slide 20 of 37</a:t>
+              <a:t>वेबसाइट: sagarcoaching.tech  |  Slide 20 of 37</a:t>
             </a:r>
           </a:p>
         </p:txBody>
@@ -9323,7 +9323,7 @@
               </a:defRPr>
             </a:pPr>
             <a:r>
-              <a:t>WhatsApp / Helpline: +91 91101 13671  |  वेबसाइट: sagarcoaching.tech  |  Slide 21 of 37</a:t>
+              <a:t>वेबसाइट: sagarcoaching.tech  |  Slide 21 of 37</a:t>
             </a:r>
           </a:p>
         </p:txBody>
@@ -9841,7 +9841,7 @@
               </a:defRPr>
             </a:pPr>
             <a:r>
-              <a:t>WhatsApp / Helpline: +91 91101 13671  |  वेबसाइट: sagarcoaching.tech  |  Slide 22 of 37</a:t>
+              <a:t>वेबसाइट: sagarcoaching.tech  |  Slide 22 of 37</a:t>
             </a:r>
           </a:p>
         </p:txBody>
@@ -10288,7 +10288,7 @@
               </a:defRPr>
             </a:pPr>
             <a:r>
-              <a:t>WhatsApp / Helpline: +91 91101 13671  |  वेबसाइट: sagarcoaching.tech  |  Slide 23 of 37</a:t>
+              <a:t>वेबसाइट: sagarcoaching.tech  |  Slide 23 of 37</a:t>
             </a:r>
           </a:p>
         </p:txBody>
@@ -10806,7 +10806,7 @@
               </a:defRPr>
             </a:pPr>
             <a:r>
-              <a:t>WhatsApp / Helpline: +91 91101 13671  |  वेबसाइट: sagarcoaching.tech  |  Slide 24 of 37</a:t>
+              <a:t>वेबसाइट: sagarcoaching.tech  |  Slide 24 of 37</a:t>
             </a:r>
           </a:p>
         </p:txBody>
@@ -11253,7 +11253,7 @@
               </a:defRPr>
             </a:pPr>
             <a:r>
-              <a:t>WhatsApp / Helpline: +91 91101 13671  |  वेबसाइट: sagarcoaching.tech  |  Slide 25 of 37</a:t>
+              <a:t>वेबसाइट: sagarcoaching.tech  |  Slide 25 of 37</a:t>
             </a:r>
           </a:p>
         </p:txBody>
@@ -11771,7 +11771,7 @@
               </a:defRPr>
             </a:pPr>
             <a:r>
-              <a:t>WhatsApp / Helpline: +91 91101 13671  |  वेबसाइट: sagarcoaching.tech  |  Slide 26 of 37</a:t>
+              <a:t>वेबसाइट: sagarcoaching.tech  |  Slide 26 of 37</a:t>
             </a:r>
           </a:p>
         </p:txBody>
@@ -12218,7 +12218,7 @@
               </a:defRPr>
             </a:pPr>
             <a:r>
-              <a:t>WhatsApp / Helpline: +91 91101 13671  |  वेबसाइट: sagarcoaching.tech  |  Slide 27 of 37</a:t>
+              <a:t>वेबसाइट: sagarcoaching.tech  |  Slide 27 of 37</a:t>
             </a:r>
           </a:p>
         </p:txBody>
@@ -12736,7 +12736,7 @@
               </a:defRPr>
             </a:pPr>
             <a:r>
-              <a:t>WhatsApp / Helpline: +91 91101 13671  |  वेबसाइट: sagarcoaching.tech  |  Slide 28 of 37</a:t>
+              <a:t>वेबसाइट: sagarcoaching.tech  |  Slide 28 of 37</a:t>
             </a:r>
           </a:p>
         </p:txBody>
@@ -13183,7 +13183,7 @@
               </a:defRPr>
             </a:pPr>
             <a:r>
-              <a:t>WhatsApp / Helpline: +91 91101 13671  |  वेबसाइट: sagarcoaching.tech  |  Slide 29 of 37</a:t>
+              <a:t>वेबसाइट: sagarcoaching.tech  |  Slide 29 of 37</a:t>
             </a:r>
           </a:p>
         </p:txBody>
@@ -13701,7 +13701,7 @@
               </a:defRPr>
             </a:pPr>
             <a:r>
-              <a:t>WhatsApp / Helpline: +91 91101 13671  |  वेबसाइट: sagarcoaching.tech  |  Slide 3 of 37</a:t>
+              <a:t>वेबसाइट: sagarcoaching.tech  |  Slide 3 of 37</a:t>
             </a:r>
           </a:p>
         </p:txBody>
@@ -14004,7 +14004,7 @@
               </a:defRPr>
             </a:pPr>
             <a:r>
-              <a:t>WhatsApp / Helpline: +91 91101 13671  |  वेबसाइट: sagarcoaching.tech  |  Slide 30 of 37</a:t>
+              <a:t>वेबसाइट: sagarcoaching.tech  |  Slide 30 of 37</a:t>
             </a:r>
           </a:p>
         </p:txBody>
@@ -14451,7 +14451,7 @@
               </a:defRPr>
             </a:pPr>
             <a:r>
-              <a:t>WhatsApp / Helpline: +91 91101 13671  |  वेबसाइट: sagarcoaching.tech  |  Slide 31 of 37</a:t>
+              <a:t>वेबसाइट: sagarcoaching.tech  |  Slide 31 of 37</a:t>
             </a:r>
           </a:p>
         </p:txBody>
@@ -14969,7 +14969,7 @@
               </a:defRPr>
             </a:pPr>
             <a:r>
-              <a:t>WhatsApp / Helpline: +91 91101 13671  |  वेबसाइट: sagarcoaching.tech  |  Slide 32 of 37</a:t>
+              <a:t>वेबसाइट: sagarcoaching.tech  |  Slide 32 of 37</a:t>
             </a:r>
           </a:p>
         </p:txBody>
@@ -15416,7 +15416,7 @@
               </a:defRPr>
             </a:pPr>
             <a:r>
-              <a:t>WhatsApp / Helpline: +91 91101 13671  |  वेबसाइट: sagarcoaching.tech  |  Slide 33 of 37</a:t>
+              <a:t>वेबसाइट: sagarcoaching.tech  |  Slide 33 of 37</a:t>
             </a:r>
           </a:p>
         </p:txBody>
@@ -15934,7 +15934,7 @@
               </a:defRPr>
             </a:pPr>
             <a:r>
-              <a:t>WhatsApp / Helpline: +91 91101 13671  |  वेबसाइट: sagarcoaching.tech  |  Slide 34 of 37</a:t>
+              <a:t>वेबसाइट: sagarcoaching.tech  |  Slide 34 of 37</a:t>
             </a:r>
           </a:p>
         </p:txBody>
@@ -16381,7 +16381,7 @@
               </a:defRPr>
             </a:pPr>
             <a:r>
-              <a:t>WhatsApp / Helpline: +91 91101 13671  |  वेबसाइट: sagarcoaching.tech  |  Slide 35 of 37</a:t>
+              <a:t>वेबसाइट: sagarcoaching.tech  |  Slide 35 of 37</a:t>
             </a:r>
           </a:p>
         </p:txBody>
@@ -16899,7 +16899,7 @@
               </a:defRPr>
             </a:pPr>
             <a:r>
-              <a:t>WhatsApp / Helpline: +91 91101 13671  |  वेबसाइट: sagarcoaching.tech  |  Slide 36 of 37</a:t>
+              <a:t>वेबसाइट: sagarcoaching.tech  |  Slide 36 of 37</a:t>
             </a:r>
           </a:p>
         </p:txBody>
@@ -17221,7 +17221,7 @@
               </a:defRPr>
             </a:pPr>
             <a:r>
-              <a:t>WhatsApp / Helpline: +91 91101 13671  |  वेबसाइट: sagarcoaching.tech  |  Slide 37 of 37</a:t>
+              <a:t>वेबसाइट: sagarcoaching.tech  |  Slide 37 of 37</a:t>
             </a:r>
           </a:p>
         </p:txBody>
@@ -17505,7 +17505,7 @@
               </a:defRPr>
             </a:pPr>
             <a:r>
-              <a:t>WhatsApp / Helpline: +91 91101 13671  |  वेबसाइट: sagarcoaching.tech  |  Slide 4 of 37</a:t>
+              <a:t>वेबसाइट: sagarcoaching.tech  |  Slide 4 of 37</a:t>
             </a:r>
           </a:p>
         </p:txBody>
@@ -17827,7 +17827,7 @@
               </a:defRPr>
             </a:pPr>
             <a:r>
-              <a:t>WhatsApp / Helpline: +91 91101 13671  |  वेबसाइट: sagarcoaching.tech  |  Slide 5 of 37</a:t>
+              <a:t>वेबसाइट: sagarcoaching.tech  |  Slide 5 of 37</a:t>
             </a:r>
           </a:p>
         </p:txBody>
@@ -18149,7 +18149,7 @@
               </a:defRPr>
             </a:pPr>
             <a:r>
-              <a:t>WhatsApp / Helpline: +91 91101 13671  |  वेबसाइट: sagarcoaching.tech  |  Slide 6 of 37</a:t>
+              <a:t>वेबसाइट: sagarcoaching.tech  |  Slide 6 of 37</a:t>
             </a:r>
           </a:p>
         </p:txBody>
@@ -18596,7 +18596,7 @@
               </a:defRPr>
             </a:pPr>
             <a:r>
-              <a:t>WhatsApp / Helpline: +91 91101 13671  |  वेबसाइट: sagarcoaching.tech  |  Slide 7 of 37</a:t>
+              <a:t>वेबसाइट: sagarcoaching.tech  |  Slide 7 of 37</a:t>
             </a:r>
           </a:p>
         </p:txBody>
@@ -19114,7 +19114,7 @@
               </a:defRPr>
             </a:pPr>
             <a:r>
-              <a:t>WhatsApp / Helpline: +91 91101 13671  |  वेबसाइट: sagarcoaching.tech  |  Slide 8 of 37</a:t>
+              <a:t>वेबसाइट: sagarcoaching.tech  |  Slide 8 of 37</a:t>
             </a:r>
           </a:p>
         </p:txBody>
@@ -19561,7 +19561,7 @@
               </a:defRPr>
             </a:pPr>
             <a:r>
-              <a:t>WhatsApp / Helpline: +91 91101 13671  |  वेबसाइट: sagarcoaching.tech  |  Slide 9 of 37</a:t>
+              <a:t>वेबसाइट: sagarcoaching.tech  |  Slide 9 of 37</a:t>
             </a:r>
           </a:p>
         </p:txBody>
